--- a/public/fun/cards/beauty/beauty-19.pptx
+++ b/public/fun/cards/beauty/beauty-19.pptx
@@ -3085,7 +3085,7 @@
     <p:bg>
       <p:bgPr>
         <a:solidFill>
-          <a:srgbClr val="7E653E"/>
+          <a:srgbClr val="F3F4F6"/>
         </a:solidFill>
         <a:effectLst/>
       </p:bgPr>
@@ -3099,20 +3099,20 @@
       <p:grpSpPr/>
       <p:sp>
         <p:nvSpPr>
-          <p:cNvPr id="2" name="Rectangle 1"/>
+          <p:cNvPr id="2" name="Oval 1"/>
           <p:cNvSpPr/>
           <p:nvPr/>
         </p:nvSpPr>
         <p:spPr>
           <a:xfrm>
-            <a:off x="2196000" y="0"/>
-            <a:ext cx="1044000" cy="1800000"/>
+            <a:off x="547200" y="475200"/>
+            <a:ext cx="849600" cy="849600"/>
           </a:xfrm>
-          <a:prstGeom prst="rect">
+          <a:prstGeom prst="ellipse">
             <a:avLst/>
           </a:prstGeom>
           <a:solidFill>
-            <a:srgbClr val="ECE3D4"/>
+            <a:srgbClr val="DEDFF7"/>
           </a:solidFill>
           <a:ln>
             <a:noFill/>
@@ -3134,14 +3134,16 @@
         </p:nvSpPr>
         <p:spPr>
           <a:xfrm>
-            <a:off x="2652480" y="488160"/>
-            <a:ext cx="131040" cy="221760"/>
+            <a:off x="187200" y="475200"/>
+            <a:ext cx="849600" cy="849600"/>
           </a:xfrm>
           <a:prstGeom prst="ellipse">
             <a:avLst/>
           </a:prstGeom>
           <a:solidFill>
-            <a:srgbClr val="666666"/>
+            <a:srgbClr val="5B5BFF">
+              <a:alpha val="92000"/>
+            </a:srgbClr>
           </a:solidFill>
           <a:ln>
             <a:noFill/>
@@ -3157,159 +3159,14 @@
       </p:sp>
       <p:sp>
         <p:nvSpPr>
-          <p:cNvPr id="4" name="Oval 3"/>
-          <p:cNvSpPr/>
-          <p:nvPr/>
-        </p:nvSpPr>
-        <p:spPr>
-          <a:xfrm rot="4320000">
-            <a:off x="2767520" y="571741"/>
-            <a:ext cx="131040" cy="221760"/>
-          </a:xfrm>
-          <a:prstGeom prst="ellipse">
-            <a:avLst/>
-          </a:prstGeom>
-          <a:solidFill>
-            <a:srgbClr val="666666"/>
-          </a:solidFill>
-          <a:ln>
-            <a:noFill/>
-          </a:ln>
-        </p:spPr>
-        <p:txBody>
-          <a:bodyPr rtlCol="0" anchor="ctr"/>
-          <a:lstStyle/>
-          <a:p>
-            <a:pPr algn="ctr"/>
-          </a:p>
-        </p:txBody>
-      </p:sp>
-      <p:sp>
-        <p:nvSpPr>
-          <p:cNvPr id="5" name="Oval 4"/>
-          <p:cNvSpPr/>
-          <p:nvPr/>
-        </p:nvSpPr>
-        <p:spPr>
-          <a:xfrm rot="8640000">
-            <a:off x="2723579" y="706979"/>
-            <a:ext cx="131040" cy="221760"/>
-          </a:xfrm>
-          <a:prstGeom prst="ellipse">
-            <a:avLst/>
-          </a:prstGeom>
-          <a:solidFill>
-            <a:srgbClr val="666666"/>
-          </a:solidFill>
-          <a:ln>
-            <a:noFill/>
-          </a:ln>
-        </p:spPr>
-        <p:txBody>
-          <a:bodyPr rtlCol="0" anchor="ctr"/>
-          <a:lstStyle/>
-          <a:p>
-            <a:pPr algn="ctr"/>
-          </a:p>
-        </p:txBody>
-      </p:sp>
-      <p:sp>
-        <p:nvSpPr>
-          <p:cNvPr id="6" name="Oval 5"/>
-          <p:cNvSpPr/>
-          <p:nvPr/>
-        </p:nvSpPr>
-        <p:spPr>
-          <a:xfrm rot="12960000">
-            <a:off x="2581381" y="706979"/>
-            <a:ext cx="131040" cy="221760"/>
-          </a:xfrm>
-          <a:prstGeom prst="ellipse">
-            <a:avLst/>
-          </a:prstGeom>
-          <a:solidFill>
-            <a:srgbClr val="666666"/>
-          </a:solidFill>
-          <a:ln>
-            <a:noFill/>
-          </a:ln>
-        </p:spPr>
-        <p:txBody>
-          <a:bodyPr rtlCol="0" anchor="ctr"/>
-          <a:lstStyle/>
-          <a:p>
-            <a:pPr algn="ctr"/>
-          </a:p>
-        </p:txBody>
-      </p:sp>
-      <p:sp>
-        <p:nvSpPr>
-          <p:cNvPr id="7" name="Oval 6"/>
-          <p:cNvSpPr/>
-          <p:nvPr/>
-        </p:nvSpPr>
-        <p:spPr>
-          <a:xfrm rot="17280000">
-            <a:off x="2537440" y="571741"/>
-            <a:ext cx="131040" cy="221760"/>
-          </a:xfrm>
-          <a:prstGeom prst="ellipse">
-            <a:avLst/>
-          </a:prstGeom>
-          <a:solidFill>
-            <a:srgbClr val="666666"/>
-          </a:solidFill>
-          <a:ln>
-            <a:noFill/>
-          </a:ln>
-        </p:spPr>
-        <p:txBody>
-          <a:bodyPr rtlCol="0" anchor="ctr"/>
-          <a:lstStyle/>
-          <a:p>
-            <a:pPr algn="ctr"/>
-          </a:p>
-        </p:txBody>
-      </p:sp>
-      <p:sp>
-        <p:nvSpPr>
-          <p:cNvPr id="8" name="Oval 7"/>
-          <p:cNvSpPr/>
+          <p:cNvPr id="4" name="텍스트"/>
+          <p:cNvSpPr txBox="1"/>
           <p:nvPr/>
         </p:nvSpPr>
         <p:spPr>
           <a:xfrm>
-            <a:off x="2662560" y="664560"/>
-            <a:ext cx="110880" cy="110880"/>
-          </a:xfrm>
-          <a:prstGeom prst="ellipse">
-            <a:avLst/>
-          </a:prstGeom>
-          <a:solidFill>
-            <a:srgbClr val="E8E8E8"/>
-          </a:solidFill>
-          <a:ln>
-            <a:noFill/>
-          </a:ln>
-        </p:spPr>
-        <p:txBody>
-          <a:bodyPr rtlCol="0" anchor="ctr"/>
-          <a:lstStyle/>
-          <a:p>
-            <a:pPr algn="ctr"/>
-          </a:p>
-        </p:txBody>
-      </p:sp>
-      <p:sp>
-        <p:nvSpPr>
-          <p:cNvPr id="9" name="텍스트"/>
-          <p:cNvSpPr txBox="1"/>
-          <p:nvPr/>
-        </p:nvSpPr>
-        <p:spPr>
-          <a:xfrm>
-            <a:off x="2268000" y="1224000"/>
-            <a:ext cx="900000" cy="216000"/>
+            <a:off x="1692000" y="223200"/>
+            <a:ext cx="1296000" cy="133351"/>
           </a:xfrm>
           <a:prstGeom prst="rect">
             <a:avLst/>
@@ -3322,15 +3179,15 @@
           </a:bodyPr>
           <a:lstStyle/>
           <a:p>
-            <a:pPr algn="ctr">
+            <a:pPr algn="l">
               <a:lnSpc>
-                <a:spcPts val="1160"/>
+                <a:spcPts val="1015"/>
               </a:lnSpc>
             </a:pPr>
             <a:r>
-              <a:rPr sz="800" b="1" spc="150">
+              <a:rPr sz="700" b="1" spc="200">
                 <a:solidFill>
-                  <a:srgbClr val="666666"/>
+                  <a:srgbClr val="6B7280"/>
                 </a:solidFill>
                 <a:latin typeface="맑은 고딕"/>
                 <a:ea typeface="맑은 고딕"/>
@@ -3342,14 +3199,14 @@
       </p:sp>
       <p:sp>
         <p:nvSpPr>
-          <p:cNvPr id="10" name="텍스트"/>
+          <p:cNvPr id="5" name="텍스트"/>
           <p:cNvSpPr txBox="1"/>
           <p:nvPr/>
         </p:nvSpPr>
         <p:spPr>
           <a:xfrm>
-            <a:off x="216000" y="331200"/>
-            <a:ext cx="1872000" cy="313692"/>
+            <a:off x="1692000" y="540000"/>
+            <a:ext cx="1368000" cy="360000"/>
           </a:xfrm>
           <a:prstGeom prst="rect">
             <a:avLst/>
@@ -3364,13 +3221,13 @@
           <a:p>
             <a:pPr algn="l">
               <a:lnSpc>
-                <a:spcPts val="2755"/>
+                <a:spcPts val="3190"/>
               </a:lnSpc>
             </a:pPr>
             <a:r>
-              <a:rPr sz="1900" b="1" spc="50">
+              <a:rPr sz="2200" b="1">
                 <a:solidFill>
-                  <a:srgbClr val="FFFFFF"/>
+                  <a:srgbClr val="12151C"/>
                 </a:solidFill>
                 <a:latin typeface="맑은 고딕"/>
                 <a:ea typeface="맑은 고딕"/>
@@ -3382,14 +3239,14 @@
       </p:sp>
       <p:sp>
         <p:nvSpPr>
-          <p:cNvPr id="11" name="텍스트"/>
+          <p:cNvPr id="6" name="텍스트"/>
           <p:cNvSpPr txBox="1"/>
           <p:nvPr/>
         </p:nvSpPr>
         <p:spPr>
           <a:xfrm>
-            <a:off x="216000" y="619200"/>
-            <a:ext cx="1872000" cy="122400"/>
+            <a:off x="1692000" y="943200"/>
+            <a:ext cx="1368000" cy="171451"/>
           </a:xfrm>
           <a:prstGeom prst="rect">
             <a:avLst/>
@@ -3404,13 +3261,13 @@
           <a:p>
             <a:pPr algn="l">
               <a:lnSpc>
-                <a:spcPts val="1232"/>
+                <a:spcPts val="1305"/>
               </a:lnSpc>
             </a:pPr>
             <a:r>
-              <a:rPr sz="850" b="1">
+              <a:rPr sz="900" b="0">
                 <a:solidFill>
-                  <a:srgbClr val="F0E9DD"/>
+                  <a:srgbClr val="6B7280"/>
                 </a:solidFill>
                 <a:latin typeface="맑은 고딕"/>
                 <a:ea typeface="맑은 고딕"/>
@@ -3422,20 +3279,20 @@
       </p:sp>
       <p:sp>
         <p:nvSpPr>
-          <p:cNvPr id="12" name="Rectangle 11"/>
+          <p:cNvPr id="7" name="Rectangle 6"/>
           <p:cNvSpPr/>
           <p:nvPr/>
         </p:nvSpPr>
         <p:spPr>
           <a:xfrm>
-            <a:off x="216000" y="828000"/>
-            <a:ext cx="201600" cy="14400"/>
+            <a:off x="1692000" y="1195200"/>
+            <a:ext cx="144000" cy="18000"/>
           </a:xfrm>
           <a:prstGeom prst="rect">
             <a:avLst/>
           </a:prstGeom>
           <a:solidFill>
-            <a:srgbClr val="ECE3D4"/>
+            <a:srgbClr val="5B5BFF"/>
           </a:solidFill>
           <a:ln>
             <a:noFill/>
@@ -3451,14 +3308,14 @@
       </p:sp>
       <p:sp>
         <p:nvSpPr>
-          <p:cNvPr id="13" name="텍스트"/>
+          <p:cNvPr id="8" name="텍스트"/>
           <p:cNvSpPr txBox="1"/>
           <p:nvPr/>
         </p:nvSpPr>
         <p:spPr>
           <a:xfrm>
-            <a:off x="216000" y="1008000"/>
-            <a:ext cx="122400" cy="168911"/>
+            <a:off x="1692000" y="1328400"/>
+            <a:ext cx="331200" cy="99061"/>
           </a:xfrm>
           <a:prstGeom prst="rect">
             <a:avLst/>
@@ -3473,32 +3330,32 @@
           <a:p>
             <a:pPr algn="l">
               <a:lnSpc>
-                <a:spcPts val="1015"/>
+                <a:spcPts val="754"/>
               </a:lnSpc>
             </a:pPr>
             <a:r>
-              <a:rPr sz="700" b="1">
+              <a:rPr sz="520" b="1" spc="120">
                 <a:solidFill>
-                  <a:srgbClr val="F0E9DD"/>
+                  <a:srgbClr val="6B7280"/>
                 </a:solidFill>
                 <a:latin typeface="맑은 고딕"/>
                 <a:ea typeface="맑은 고딕"/>
               </a:rPr>
-              <a:t>T</a:t>
-            </a:r>
-          </a:p>
-        </p:txBody>
-      </p:sp>
-      <p:sp>
-        <p:nvSpPr>
-          <p:cNvPr id="14" name="텍스트"/>
+              <a:t>TEL</a:t>
+            </a:r>
+          </a:p>
+        </p:txBody>
+      </p:sp>
+      <p:sp>
+        <p:nvSpPr>
+          <p:cNvPr id="9" name="텍스트"/>
           <p:cNvSpPr txBox="1"/>
           <p:nvPr/>
         </p:nvSpPr>
         <p:spPr>
           <a:xfrm>
-            <a:off x="360000" y="1008000"/>
-            <a:ext cx="1584000" cy="168911"/>
+            <a:off x="2023200" y="1317600"/>
+            <a:ext cx="1188000" cy="125731"/>
           </a:xfrm>
           <a:prstGeom prst="rect">
             <a:avLst/>
@@ -3513,13 +3370,13 @@
           <a:p>
             <a:pPr algn="l">
               <a:lnSpc>
-                <a:spcPts val="1015"/>
+                <a:spcPts val="956"/>
               </a:lnSpc>
             </a:pPr>
             <a:r>
-              <a:rPr sz="700" b="0">
+              <a:rPr sz="660" b="0">
                 <a:solidFill>
-                  <a:srgbClr val="FFFFFF"/>
+                  <a:srgbClr val="12151C"/>
                 </a:solidFill>
                 <a:latin typeface="맑은 고딕"/>
                 <a:ea typeface="맑은 고딕"/>
@@ -3531,14 +3388,14 @@
       </p:sp>
       <p:sp>
         <p:nvSpPr>
-          <p:cNvPr id="15" name="텍스트"/>
+          <p:cNvPr id="10" name="텍스트"/>
           <p:cNvSpPr txBox="1"/>
           <p:nvPr/>
         </p:nvSpPr>
         <p:spPr>
           <a:xfrm>
-            <a:off x="216000" y="1176911"/>
-            <a:ext cx="122400" cy="168911"/>
+            <a:off x="1692000" y="1458000"/>
+            <a:ext cx="331200" cy="99061"/>
           </a:xfrm>
           <a:prstGeom prst="rect">
             <a:avLst/>
@@ -3553,32 +3410,32 @@
           <a:p>
             <a:pPr algn="l">
               <a:lnSpc>
-                <a:spcPts val="1015"/>
+                <a:spcPts val="754"/>
               </a:lnSpc>
             </a:pPr>
             <a:r>
-              <a:rPr sz="700" b="1">
+              <a:rPr sz="520" b="1" spc="120">
                 <a:solidFill>
-                  <a:srgbClr val="F0E9DD"/>
+                  <a:srgbClr val="6B7280"/>
                 </a:solidFill>
                 <a:latin typeface="맑은 고딕"/>
                 <a:ea typeface="맑은 고딕"/>
               </a:rPr>
-              <a:t>E</a:t>
-            </a:r>
-          </a:p>
-        </p:txBody>
-      </p:sp>
-      <p:sp>
-        <p:nvSpPr>
-          <p:cNvPr id="16" name="텍스트"/>
+              <a:t>MAIL</a:t>
+            </a:r>
+          </a:p>
+        </p:txBody>
+      </p:sp>
+      <p:sp>
+        <p:nvSpPr>
+          <p:cNvPr id="11" name="텍스트"/>
           <p:cNvSpPr txBox="1"/>
           <p:nvPr/>
         </p:nvSpPr>
         <p:spPr>
           <a:xfrm>
-            <a:off x="360000" y="1176911"/>
-            <a:ext cx="1584000" cy="168911"/>
+            <a:off x="2023200" y="1447200"/>
+            <a:ext cx="1188000" cy="125731"/>
           </a:xfrm>
           <a:prstGeom prst="rect">
             <a:avLst/>
@@ -3593,13 +3450,13 @@
           <a:p>
             <a:pPr algn="l">
               <a:lnSpc>
-                <a:spcPts val="1015"/>
+                <a:spcPts val="956"/>
               </a:lnSpc>
             </a:pPr>
             <a:r>
-              <a:rPr sz="700" b="0">
+              <a:rPr sz="660" b="0">
                 <a:solidFill>
-                  <a:srgbClr val="FFFFFF"/>
+                  <a:srgbClr val="12151C"/>
                 </a:solidFill>
                 <a:latin typeface="맑은 고딕"/>
                 <a:ea typeface="맑은 고딕"/>
@@ -3611,14 +3468,14 @@
       </p:sp>
       <p:sp>
         <p:nvSpPr>
-          <p:cNvPr id="17" name="텍스트"/>
+          <p:cNvPr id="12" name="텍스트"/>
           <p:cNvSpPr txBox="1"/>
           <p:nvPr/>
         </p:nvSpPr>
         <p:spPr>
           <a:xfrm>
-            <a:off x="216000" y="1345822"/>
-            <a:ext cx="122400" cy="168911"/>
+            <a:off x="1692000" y="1587600"/>
+            <a:ext cx="331200" cy="99061"/>
           </a:xfrm>
           <a:prstGeom prst="rect">
             <a:avLst/>
@@ -3633,32 +3490,32 @@
           <a:p>
             <a:pPr algn="l">
               <a:lnSpc>
-                <a:spcPts val="1015"/>
+                <a:spcPts val="754"/>
               </a:lnSpc>
             </a:pPr>
             <a:r>
-              <a:rPr sz="700" b="1">
+              <a:rPr sz="520" b="1" spc="120">
                 <a:solidFill>
-                  <a:srgbClr val="F0E9DD"/>
+                  <a:srgbClr val="6B7280"/>
                 </a:solidFill>
                 <a:latin typeface="맑은 고딕"/>
                 <a:ea typeface="맑은 고딕"/>
               </a:rPr>
-              <a:t>A</a:t>
-            </a:r>
-          </a:p>
-        </p:txBody>
-      </p:sp>
-      <p:sp>
-        <p:nvSpPr>
-          <p:cNvPr id="18" name="텍스트"/>
+              <a:t>ADDR</a:t>
+            </a:r>
+          </a:p>
+        </p:txBody>
+      </p:sp>
+      <p:sp>
+        <p:nvSpPr>
+          <p:cNvPr id="13" name="텍스트"/>
           <p:cNvSpPr txBox="1"/>
           <p:nvPr/>
         </p:nvSpPr>
         <p:spPr>
           <a:xfrm>
-            <a:off x="360000" y="1345822"/>
-            <a:ext cx="1584000" cy="168911"/>
+            <a:off x="2023200" y="1576800"/>
+            <a:ext cx="1188000" cy="125731"/>
           </a:xfrm>
           <a:prstGeom prst="rect">
             <a:avLst/>
@@ -3673,13 +3530,13 @@
           <a:p>
             <a:pPr algn="l">
               <a:lnSpc>
-                <a:spcPts val="1015"/>
+                <a:spcPts val="956"/>
               </a:lnSpc>
             </a:pPr>
             <a:r>
-              <a:rPr sz="700" b="0">
+              <a:rPr sz="660" b="0">
                 <a:solidFill>
-                  <a:srgbClr val="FFFFFF"/>
+                  <a:srgbClr val="12151C"/>
                 </a:solidFill>
                 <a:latin typeface="맑은 고딕"/>
                 <a:ea typeface="맑은 고딕"/>
@@ -3703,7 +3560,7 @@
     <p:bg>
       <p:bgPr>
         <a:solidFill>
-          <a:srgbClr val="59472C"/>
+          <a:srgbClr val="0E1116"/>
         </a:solidFill>
         <a:effectLst/>
       </p:bgPr>
@@ -3717,20 +3574,20 @@
       <p:grpSpPr/>
       <p:sp>
         <p:nvSpPr>
-          <p:cNvPr id="2" name="Rectangle 1"/>
+          <p:cNvPr id="2" name="Oval 1"/>
           <p:cNvSpPr/>
           <p:nvPr/>
         </p:nvSpPr>
         <p:spPr>
           <a:xfrm>
-            <a:off x="0" y="0"/>
-            <a:ext cx="3240000" cy="1800000"/>
+            <a:off x="1411200" y="295200"/>
+            <a:ext cx="417600" cy="417600"/>
           </a:xfrm>
-          <a:prstGeom prst="rect">
+          <a:prstGeom prst="ellipse">
             <a:avLst/>
           </a:prstGeom>
           <a:solidFill>
-            <a:srgbClr val="B8A17F"/>
+            <a:srgbClr val="6F6FFF"/>
           </a:solidFill>
           <a:ln>
             <a:noFill/>
@@ -3746,188 +3603,14 @@
       </p:sp>
       <p:sp>
         <p:nvSpPr>
-          <p:cNvPr id="3" name="Oval 2"/>
-          <p:cNvSpPr/>
+          <p:cNvPr id="3" name="텍스트"/>
+          <p:cNvSpPr txBox="1"/>
           <p:nvPr/>
         </p:nvSpPr>
         <p:spPr>
           <a:xfrm>
-            <a:off x="1573200" y="374400"/>
-            <a:ext cx="93600" cy="158400"/>
-          </a:xfrm>
-          <a:prstGeom prst="ellipse">
-            <a:avLst/>
-          </a:prstGeom>
-          <a:solidFill>
-            <a:srgbClr val="FFFFFF"/>
-          </a:solidFill>
-          <a:ln>
-            <a:noFill/>
-          </a:ln>
-        </p:spPr>
-        <p:txBody>
-          <a:bodyPr rtlCol="0" anchor="ctr"/>
-          <a:lstStyle/>
-          <a:p>
-            <a:pPr algn="ctr"/>
-          </a:p>
-        </p:txBody>
-      </p:sp>
-      <p:sp>
-        <p:nvSpPr>
-          <p:cNvPr id="4" name="Oval 3"/>
-          <p:cNvSpPr/>
-          <p:nvPr/>
-        </p:nvSpPr>
-        <p:spPr>
-          <a:xfrm rot="4320000">
-            <a:off x="1655371" y="434101"/>
-            <a:ext cx="93600" cy="158400"/>
-          </a:xfrm>
-          <a:prstGeom prst="ellipse">
-            <a:avLst/>
-          </a:prstGeom>
-          <a:solidFill>
-            <a:srgbClr val="FFFFFF"/>
-          </a:solidFill>
-          <a:ln>
-            <a:noFill/>
-          </a:ln>
-        </p:spPr>
-        <p:txBody>
-          <a:bodyPr rtlCol="0" anchor="ctr"/>
-          <a:lstStyle/>
-          <a:p>
-            <a:pPr algn="ctr"/>
-          </a:p>
-        </p:txBody>
-      </p:sp>
-      <p:sp>
-        <p:nvSpPr>
-          <p:cNvPr id="5" name="Oval 4"/>
-          <p:cNvSpPr/>
-          <p:nvPr/>
-        </p:nvSpPr>
-        <p:spPr>
-          <a:xfrm rot="8640000">
-            <a:off x="1623985" y="530699"/>
-            <a:ext cx="93600" cy="158400"/>
-          </a:xfrm>
-          <a:prstGeom prst="ellipse">
-            <a:avLst/>
-          </a:prstGeom>
-          <a:solidFill>
-            <a:srgbClr val="FFFFFF"/>
-          </a:solidFill>
-          <a:ln>
-            <a:noFill/>
-          </a:ln>
-        </p:spPr>
-        <p:txBody>
-          <a:bodyPr rtlCol="0" anchor="ctr"/>
-          <a:lstStyle/>
-          <a:p>
-            <a:pPr algn="ctr"/>
-          </a:p>
-        </p:txBody>
-      </p:sp>
-      <p:sp>
-        <p:nvSpPr>
-          <p:cNvPr id="6" name="Oval 5"/>
-          <p:cNvSpPr/>
-          <p:nvPr/>
-        </p:nvSpPr>
-        <p:spPr>
-          <a:xfrm rot="12960000">
-            <a:off x="1522415" y="530699"/>
-            <a:ext cx="93600" cy="158400"/>
-          </a:xfrm>
-          <a:prstGeom prst="ellipse">
-            <a:avLst/>
-          </a:prstGeom>
-          <a:solidFill>
-            <a:srgbClr val="FFFFFF"/>
-          </a:solidFill>
-          <a:ln>
-            <a:noFill/>
-          </a:ln>
-        </p:spPr>
-        <p:txBody>
-          <a:bodyPr rtlCol="0" anchor="ctr"/>
-          <a:lstStyle/>
-          <a:p>
-            <a:pPr algn="ctr"/>
-          </a:p>
-        </p:txBody>
-      </p:sp>
-      <p:sp>
-        <p:nvSpPr>
-          <p:cNvPr id="7" name="Oval 6"/>
-          <p:cNvSpPr/>
-          <p:nvPr/>
-        </p:nvSpPr>
-        <p:spPr>
-          <a:xfrm rot="17280000">
-            <a:off x="1491029" y="434101"/>
-            <a:ext cx="93600" cy="158400"/>
-          </a:xfrm>
-          <a:prstGeom prst="ellipse">
-            <a:avLst/>
-          </a:prstGeom>
-          <a:solidFill>
-            <a:srgbClr val="FFFFFF"/>
-          </a:solidFill>
-          <a:ln>
-            <a:noFill/>
-          </a:ln>
-        </p:spPr>
-        <p:txBody>
-          <a:bodyPr rtlCol="0" anchor="ctr"/>
-          <a:lstStyle/>
-          <a:p>
-            <a:pPr algn="ctr"/>
-          </a:p>
-        </p:txBody>
-      </p:sp>
-      <p:sp>
-        <p:nvSpPr>
-          <p:cNvPr id="8" name="Oval 7"/>
-          <p:cNvSpPr/>
-          <p:nvPr/>
-        </p:nvSpPr>
-        <p:spPr>
-          <a:xfrm>
-            <a:off x="1580400" y="500400"/>
-            <a:ext cx="79200" cy="79200"/>
-          </a:xfrm>
-          <a:prstGeom prst="ellipse">
-            <a:avLst/>
-          </a:prstGeom>
-          <a:solidFill>
-            <a:srgbClr val="FFFFFF"/>
-          </a:solidFill>
-          <a:ln>
-            <a:noFill/>
-          </a:ln>
-        </p:spPr>
-        <p:txBody>
-          <a:bodyPr rtlCol="0" anchor="ctr"/>
-          <a:lstStyle/>
-          <a:p>
-            <a:pPr algn="ctr"/>
-          </a:p>
-        </p:txBody>
-      </p:sp>
-      <p:sp>
-        <p:nvSpPr>
-          <p:cNvPr id="9" name="텍스트"/>
-          <p:cNvSpPr txBox="1"/>
-          <p:nvPr/>
-        </p:nvSpPr>
-        <p:spPr>
-          <a:xfrm>
-            <a:off x="396000" y="835200"/>
-            <a:ext cx="2448000" cy="396000"/>
+            <a:off x="1368000" y="324000"/>
+            <a:ext cx="504000" cy="360000"/>
           </a:xfrm>
           <a:prstGeom prst="rect">
             <a:avLst/>
@@ -3942,32 +3625,32 @@
           <a:p>
             <a:pPr algn="ctr">
               <a:lnSpc>
-                <a:spcPts val="1667"/>
+                <a:spcPts val="3769"/>
               </a:lnSpc>
             </a:pPr>
             <a:r>
-              <a:rPr sz="1150" b="1">
+              <a:rPr sz="2600" b="1">
                 <a:solidFill>
                   <a:srgbClr val="FFFFFF"/>
                 </a:solidFill>
                 <a:latin typeface="맑은 고딕"/>
                 <a:ea typeface="맑은 고딕"/>
               </a:rPr>
-              <a:t>자신을 아끼는 첫걸음</a:t>
-            </a:r>
-          </a:p>
-        </p:txBody>
-      </p:sp>
-      <p:sp>
-        <p:nvSpPr>
-          <p:cNvPr id="10" name="텍스트"/>
+              <a:t>샵</a:t>
+            </a:r>
+          </a:p>
+        </p:txBody>
+      </p:sp>
+      <p:sp>
+        <p:nvSpPr>
+          <p:cNvPr id="4" name="텍스트"/>
           <p:cNvSpPr txBox="1"/>
           <p:nvPr/>
         </p:nvSpPr>
         <p:spPr>
           <a:xfrm>
-            <a:off x="360000" y="1476000"/>
-            <a:ext cx="2520000" cy="108000"/>
+            <a:off x="360000" y="820800"/>
+            <a:ext cx="2520000" cy="161926"/>
           </a:xfrm>
           <a:prstGeom prst="rect">
             <a:avLst/>
@@ -3982,11 +3665,11 @@
           <a:p>
             <a:pPr algn="ctr">
               <a:lnSpc>
-                <a:spcPts val="1015"/>
+                <a:spcPts val="1232"/>
               </a:lnSpc>
             </a:pPr>
             <a:r>
-              <a:rPr sz="700" b="1" spc="300">
+              <a:rPr sz="850" b="1" spc="200">
                 <a:solidFill>
                   <a:srgbClr val="FFFFFF"/>
                 </a:solidFill>
@@ -3994,6 +3677,75 @@
                 <a:ea typeface="맑은 고딕"/>
               </a:rPr>
               <a:t>샵 이름</a:t>
+            </a:r>
+          </a:p>
+        </p:txBody>
+      </p:sp>
+      <p:sp>
+        <p:nvSpPr>
+          <p:cNvPr id="5" name="Rectangle 4"/>
+          <p:cNvSpPr/>
+          <p:nvPr/>
+        </p:nvSpPr>
+        <p:spPr>
+          <a:xfrm>
+            <a:off x="1530000" y="1051200"/>
+            <a:ext cx="180000" cy="14400"/>
+          </a:xfrm>
+          <a:prstGeom prst="rect">
+            <a:avLst/>
+          </a:prstGeom>
+          <a:solidFill>
+            <a:srgbClr val="6F6FFF"/>
+          </a:solidFill>
+          <a:ln>
+            <a:noFill/>
+          </a:ln>
+        </p:spPr>
+        <p:txBody>
+          <a:bodyPr rtlCol="0" anchor="ctr"/>
+          <a:lstStyle/>
+          <a:p>
+            <a:pPr algn="ctr"/>
+          </a:p>
+        </p:txBody>
+      </p:sp>
+      <p:sp>
+        <p:nvSpPr>
+          <p:cNvPr id="6" name="텍스트"/>
+          <p:cNvSpPr txBox="1"/>
+          <p:nvPr/>
+        </p:nvSpPr>
+        <p:spPr>
+          <a:xfrm>
+            <a:off x="540000" y="1188000"/>
+            <a:ext cx="2160000" cy="360000"/>
+          </a:xfrm>
+          <a:prstGeom prst="rect">
+            <a:avLst/>
+          </a:prstGeom>
+          <a:noFill/>
+        </p:spPr>
+        <p:txBody>
+          <a:bodyPr wrap="square" lIns="0" rIns="0" tIns="0" bIns="0" anchor="t">
+            <a:spAutoFit/>
+          </a:bodyPr>
+          <a:lstStyle/>
+          <a:p>
+            <a:pPr algn="ctr">
+              <a:lnSpc>
+                <a:spcPts val="1305"/>
+              </a:lnSpc>
+            </a:pPr>
+            <a:r>
+              <a:rPr sz="900" b="1">
+                <a:solidFill>
+                  <a:srgbClr val="A3A9B5"/>
+                </a:solidFill>
+                <a:latin typeface="맑은 고딕"/>
+                <a:ea typeface="맑은 고딕"/>
+              </a:rPr>
+              <a:t>자신을 아끼는 첫걸음</a:t>
             </a:r>
           </a:p>
         </p:txBody>

--- a/public/fun/cards/beauty/beauty-19.pptx
+++ b/public/fun/cards/beauty/beauty-19.pptx
@@ -3097,196 +3097,37 @@
         <p:nvPr/>
       </p:nvGrpSpPr>
       <p:grpSpPr/>
-      <p:sp>
-        <p:nvSpPr>
-          <p:cNvPr id="2" name="Oval 1"/>
+      <p:cxnSp>
+        <p:nvCxnSpPr>
+          <p:cNvPr id="2" name="Connector 1"/>
+          <p:cNvCxnSpPr/>
+          <p:nvPr/>
+        </p:nvCxnSpPr>
+        <p:spPr>
+          <a:xfrm>
+            <a:off x="1080000" y="252000"/>
+            <a:ext cx="0" cy="1296000"/>
+          </a:xfrm>
+          <a:prstGeom prst="line">
+            <a:avLst/>
+          </a:prstGeom>
+          <a:ln w="3600">
+            <a:solidFill>
+              <a:srgbClr val="DCDFE4"/>
+            </a:solidFill>
+          </a:ln>
+        </p:spPr>
+      </p:cxnSp>
+      <p:sp>
+        <p:nvSpPr>
+          <p:cNvPr id="3" name="Rectangle 2"/>
           <p:cNvSpPr/>
           <p:nvPr/>
         </p:nvSpPr>
         <p:spPr>
           <a:xfrm>
-            <a:off x="547200" y="475200"/>
-            <a:ext cx="849600" cy="849600"/>
-          </a:xfrm>
-          <a:prstGeom prst="ellipse">
-            <a:avLst/>
-          </a:prstGeom>
-          <a:solidFill>
-            <a:srgbClr val="DEDFF7"/>
-          </a:solidFill>
-          <a:ln>
-            <a:noFill/>
-          </a:ln>
-        </p:spPr>
-        <p:txBody>
-          <a:bodyPr rtlCol="0" anchor="ctr"/>
-          <a:lstStyle/>
-          <a:p>
-            <a:pPr algn="ctr"/>
-          </a:p>
-        </p:txBody>
-      </p:sp>
-      <p:sp>
-        <p:nvSpPr>
-          <p:cNvPr id="3" name="Oval 2"/>
-          <p:cNvSpPr/>
-          <p:nvPr/>
-        </p:nvSpPr>
-        <p:spPr>
-          <a:xfrm>
-            <a:off x="187200" y="475200"/>
-            <a:ext cx="849600" cy="849600"/>
-          </a:xfrm>
-          <a:prstGeom prst="ellipse">
-            <a:avLst/>
-          </a:prstGeom>
-          <a:solidFill>
-            <a:srgbClr val="5B5BFF">
-              <a:alpha val="92000"/>
-            </a:srgbClr>
-          </a:solidFill>
-          <a:ln>
-            <a:noFill/>
-          </a:ln>
-        </p:spPr>
-        <p:txBody>
-          <a:bodyPr rtlCol="0" anchor="ctr"/>
-          <a:lstStyle/>
-          <a:p>
-            <a:pPr algn="ctr"/>
-          </a:p>
-        </p:txBody>
-      </p:sp>
-      <p:sp>
-        <p:nvSpPr>
-          <p:cNvPr id="4" name="텍스트"/>
-          <p:cNvSpPr txBox="1"/>
-          <p:nvPr/>
-        </p:nvSpPr>
-        <p:spPr>
-          <a:xfrm>
-            <a:off x="1692000" y="223200"/>
-            <a:ext cx="1296000" cy="133351"/>
-          </a:xfrm>
-          <a:prstGeom prst="rect">
-            <a:avLst/>
-          </a:prstGeom>
-          <a:noFill/>
-        </p:spPr>
-        <p:txBody>
-          <a:bodyPr wrap="square" lIns="0" rIns="0" tIns="0" bIns="0" anchor="t">
-            <a:spAutoFit/>
-          </a:bodyPr>
-          <a:lstStyle/>
-          <a:p>
-            <a:pPr algn="l">
-              <a:lnSpc>
-                <a:spcPts val="1015"/>
-              </a:lnSpc>
-            </a:pPr>
-            <a:r>
-              <a:rPr sz="700" b="1" spc="200">
-                <a:solidFill>
-                  <a:srgbClr val="6B7280"/>
-                </a:solidFill>
-                <a:latin typeface="맑은 고딕"/>
-                <a:ea typeface="맑은 고딕"/>
-              </a:rPr>
-              <a:t>샵 이름</a:t>
-            </a:r>
-          </a:p>
-        </p:txBody>
-      </p:sp>
-      <p:sp>
-        <p:nvSpPr>
-          <p:cNvPr id="5" name="텍스트"/>
-          <p:cNvSpPr txBox="1"/>
-          <p:nvPr/>
-        </p:nvSpPr>
-        <p:spPr>
-          <a:xfrm>
-            <a:off x="1692000" y="540000"/>
-            <a:ext cx="1368000" cy="360000"/>
-          </a:xfrm>
-          <a:prstGeom prst="rect">
-            <a:avLst/>
-          </a:prstGeom>
-          <a:noFill/>
-        </p:spPr>
-        <p:txBody>
-          <a:bodyPr wrap="square" lIns="0" rIns="0" tIns="0" bIns="0" anchor="t">
-            <a:spAutoFit/>
-          </a:bodyPr>
-          <a:lstStyle/>
-          <a:p>
-            <a:pPr algn="l">
-              <a:lnSpc>
-                <a:spcPts val="3190"/>
-              </a:lnSpc>
-            </a:pPr>
-            <a:r>
-              <a:rPr sz="2200" b="1">
-                <a:solidFill>
-                  <a:srgbClr val="12151C"/>
-                </a:solidFill>
-                <a:latin typeface="맑은 고딕"/>
-                <a:ea typeface="맑은 고딕"/>
-              </a:rPr>
-              <a:t>전보라</a:t>
-            </a:r>
-          </a:p>
-        </p:txBody>
-      </p:sp>
-      <p:sp>
-        <p:nvSpPr>
-          <p:cNvPr id="6" name="텍스트"/>
-          <p:cNvSpPr txBox="1"/>
-          <p:nvPr/>
-        </p:nvSpPr>
-        <p:spPr>
-          <a:xfrm>
-            <a:off x="1692000" y="943200"/>
-            <a:ext cx="1368000" cy="171451"/>
-          </a:xfrm>
-          <a:prstGeom prst="rect">
-            <a:avLst/>
-          </a:prstGeom>
-          <a:noFill/>
-        </p:spPr>
-        <p:txBody>
-          <a:bodyPr wrap="square" lIns="0" rIns="0" tIns="0" bIns="0" anchor="t">
-            <a:spAutoFit/>
-          </a:bodyPr>
-          <a:lstStyle/>
-          <a:p>
-            <a:pPr algn="l">
-              <a:lnSpc>
-                <a:spcPts val="1305"/>
-              </a:lnSpc>
-            </a:pPr>
-            <a:r>
-              <a:rPr sz="900" b="0">
-                <a:solidFill>
-                  <a:srgbClr val="6B7280"/>
-                </a:solidFill>
-                <a:latin typeface="맑은 고딕"/>
-                <a:ea typeface="맑은 고딕"/>
-              </a:rPr>
-              <a:t>왁싱 전문가</a:t>
-            </a:r>
-          </a:p>
-        </p:txBody>
-      </p:sp>
-      <p:sp>
-        <p:nvSpPr>
-          <p:cNvPr id="7" name="Rectangle 6"/>
-          <p:cNvSpPr/>
-          <p:nvPr/>
-        </p:nvSpPr>
-        <p:spPr>
-          <a:xfrm>
-            <a:off x="1692000" y="1195200"/>
-            <a:ext cx="144000" cy="18000"/>
+            <a:off x="1069200" y="252000"/>
+            <a:ext cx="21600" cy="201600"/>
           </a:xfrm>
           <a:prstGeom prst="rect">
             <a:avLst/>
@@ -3308,14 +3149,14 @@
       </p:sp>
       <p:sp>
         <p:nvSpPr>
-          <p:cNvPr id="8" name="텍스트"/>
+          <p:cNvPr id="4" name="텍스트"/>
           <p:cNvSpPr txBox="1"/>
           <p:nvPr/>
         </p:nvSpPr>
         <p:spPr>
           <a:xfrm>
-            <a:off x="1692000" y="1328400"/>
-            <a:ext cx="331200" cy="99061"/>
+            <a:off x="252000" y="252000"/>
+            <a:ext cx="756000" cy="123826"/>
           </a:xfrm>
           <a:prstGeom prst="rect">
             <a:avLst/>
@@ -3330,11 +3171,221 @@
           <a:p>
             <a:pPr algn="l">
               <a:lnSpc>
-                <a:spcPts val="754"/>
+                <a:spcPts val="942"/>
               </a:lnSpc>
             </a:pPr>
             <a:r>
-              <a:rPr sz="520" b="1" spc="120">
+              <a:rPr sz="650" b="1" spc="220">
+                <a:solidFill>
+                  <a:srgbClr val="6B7280"/>
+                </a:solidFill>
+                <a:latin typeface="맑은 고딕"/>
+                <a:ea typeface="맑은 고딕"/>
+              </a:rPr>
+              <a:t>샵 이름</a:t>
+            </a:r>
+          </a:p>
+        </p:txBody>
+      </p:sp>
+      <p:sp>
+        <p:nvSpPr>
+          <p:cNvPr id="5" name="Oval 4"/>
+          <p:cNvSpPr/>
+          <p:nvPr/>
+        </p:nvSpPr>
+        <p:spPr>
+          <a:xfrm>
+            <a:off x="273600" y="734400"/>
+            <a:ext cx="244800" cy="244800"/>
+          </a:xfrm>
+          <a:prstGeom prst="ellipse">
+            <a:avLst/>
+          </a:prstGeom>
+          <a:noFill/>
+          <a:ln w="5040">
+            <a:solidFill>
+              <a:srgbClr val="5B5BFF"/>
+            </a:solidFill>
+          </a:ln>
+        </p:spPr>
+        <p:txBody>
+          <a:bodyPr rtlCol="0" anchor="ctr"/>
+          <a:lstStyle/>
+          <a:p>
+            <a:pPr algn="ctr"/>
+          </a:p>
+        </p:txBody>
+      </p:sp>
+      <p:sp>
+        <p:nvSpPr>
+          <p:cNvPr id="6" name="텍스트"/>
+          <p:cNvSpPr txBox="1"/>
+          <p:nvPr/>
+        </p:nvSpPr>
+        <p:spPr>
+          <a:xfrm>
+            <a:off x="252000" y="734400"/>
+            <a:ext cx="288000" cy="252000"/>
+          </a:xfrm>
+          <a:prstGeom prst="rect">
+            <a:avLst/>
+          </a:prstGeom>
+          <a:noFill/>
+        </p:spPr>
+        <p:txBody>
+          <a:bodyPr wrap="square" lIns="0" rIns="0" tIns="0" bIns="0" anchor="ctr">
+            <a:spAutoFit/>
+          </a:bodyPr>
+          <a:lstStyle/>
+          <a:p>
+            <a:pPr algn="ctr">
+              <a:lnSpc>
+                <a:spcPts val="1305"/>
+              </a:lnSpc>
+            </a:pPr>
+            <a:r>
+              <a:rPr sz="900" b="1">
+                <a:solidFill>
+                  <a:srgbClr val="5B5BFF"/>
+                </a:solidFill>
+                <a:latin typeface="맑은 고딕"/>
+                <a:ea typeface="맑은 고딕"/>
+              </a:rPr>
+              <a:t>샵</a:t>
+            </a:r>
+          </a:p>
+        </p:txBody>
+      </p:sp>
+      <p:sp>
+        <p:nvSpPr>
+          <p:cNvPr id="7" name="텍스트"/>
+          <p:cNvSpPr txBox="1"/>
+          <p:nvPr/>
+        </p:nvSpPr>
+        <p:spPr>
+          <a:xfrm>
+            <a:off x="1260000" y="432000"/>
+            <a:ext cx="1800000" cy="237600"/>
+          </a:xfrm>
+          <a:prstGeom prst="rect">
+            <a:avLst/>
+          </a:prstGeom>
+          <a:noFill/>
+        </p:spPr>
+        <p:txBody>
+          <a:bodyPr wrap="square" lIns="0" rIns="0" tIns="0" bIns="0" anchor="t">
+            <a:spAutoFit/>
+          </a:bodyPr>
+          <a:lstStyle/>
+          <a:p>
+            <a:pPr algn="l">
+              <a:lnSpc>
+                <a:spcPts val="1957"/>
+              </a:lnSpc>
+            </a:pPr>
+            <a:r>
+              <a:rPr sz="1350" b="1" spc="120">
+                <a:solidFill>
+                  <a:srgbClr val="12151C"/>
+                </a:solidFill>
+                <a:latin typeface="맑은 고딕"/>
+                <a:ea typeface="맑은 고딕"/>
+              </a:rPr>
+              <a:t>전보라</a:t>
+            </a:r>
+          </a:p>
+        </p:txBody>
+      </p:sp>
+      <p:sp>
+        <p:nvSpPr>
+          <p:cNvPr id="8" name="텍스트"/>
+          <p:cNvSpPr txBox="1"/>
+          <p:nvPr/>
+        </p:nvSpPr>
+        <p:spPr>
+          <a:xfrm>
+            <a:off x="1260000" y="684000"/>
+            <a:ext cx="1800000" cy="133351"/>
+          </a:xfrm>
+          <a:prstGeom prst="rect">
+            <a:avLst/>
+          </a:prstGeom>
+          <a:noFill/>
+        </p:spPr>
+        <p:txBody>
+          <a:bodyPr wrap="square" lIns="0" rIns="0" tIns="0" bIns="0" anchor="t">
+            <a:spAutoFit/>
+          </a:bodyPr>
+          <a:lstStyle/>
+          <a:p>
+            <a:pPr algn="l">
+              <a:lnSpc>
+                <a:spcPts val="1015"/>
+              </a:lnSpc>
+            </a:pPr>
+            <a:r>
+              <a:rPr sz="700" b="0" spc="60">
+                <a:solidFill>
+                  <a:srgbClr val="6B7280"/>
+                </a:solidFill>
+                <a:latin typeface="맑은 고딕"/>
+                <a:ea typeface="맑은 고딕"/>
+              </a:rPr>
+              <a:t>왁싱 전문가</a:t>
+            </a:r>
+          </a:p>
+        </p:txBody>
+      </p:sp>
+      <p:cxnSp>
+        <p:nvCxnSpPr>
+          <p:cNvPr id="9" name="Connector 8"/>
+          <p:cNvCxnSpPr/>
+          <p:nvPr/>
+        </p:nvCxnSpPr>
+        <p:spPr>
+          <a:xfrm>
+            <a:off x="1260000" y="943200"/>
+            <a:ext cx="1728000" cy="0"/>
+          </a:xfrm>
+          <a:prstGeom prst="line">
+            <a:avLst/>
+          </a:prstGeom>
+          <a:ln w="3600">
+            <a:solidFill>
+              <a:srgbClr val="DCDFE4"/>
+            </a:solidFill>
+          </a:ln>
+        </p:spPr>
+      </p:cxnSp>
+      <p:sp>
+        <p:nvSpPr>
+          <p:cNvPr id="10" name="텍스트"/>
+          <p:cNvSpPr txBox="1"/>
+          <p:nvPr/>
+        </p:nvSpPr>
+        <p:spPr>
+          <a:xfrm>
+            <a:off x="1260000" y="1054800"/>
+            <a:ext cx="331200" cy="91441"/>
+          </a:xfrm>
+          <a:prstGeom prst="rect">
+            <a:avLst/>
+          </a:prstGeom>
+          <a:noFill/>
+        </p:spPr>
+        <p:txBody>
+          <a:bodyPr wrap="square" lIns="0" rIns="0" tIns="0" bIns="0" anchor="t">
+            <a:spAutoFit/>
+          </a:bodyPr>
+          <a:lstStyle/>
+          <a:p>
+            <a:pPr algn="l">
+              <a:lnSpc>
+                <a:spcPts val="696"/>
+              </a:lnSpc>
+            </a:pPr>
+            <a:r>
+              <a:rPr sz="480" b="1" spc="140">
                 <a:solidFill>
                   <a:srgbClr val="6B7280"/>
                 </a:solidFill>
@@ -3348,14 +3399,14 @@
       </p:sp>
       <p:sp>
         <p:nvSpPr>
-          <p:cNvPr id="9" name="텍스트"/>
+          <p:cNvPr id="11" name="텍스트"/>
           <p:cNvSpPr txBox="1"/>
           <p:nvPr/>
         </p:nvSpPr>
         <p:spPr>
           <a:xfrm>
-            <a:off x="2023200" y="1317600"/>
-            <a:ext cx="1188000" cy="125731"/>
+            <a:off x="1591200" y="1044000"/>
+            <a:ext cx="1188000" cy="123826"/>
           </a:xfrm>
           <a:prstGeom prst="rect">
             <a:avLst/>
@@ -3370,11 +3421,11 @@
           <a:p>
             <a:pPr algn="l">
               <a:lnSpc>
-                <a:spcPts val="956"/>
+                <a:spcPts val="942"/>
               </a:lnSpc>
             </a:pPr>
             <a:r>
-              <a:rPr sz="660" b="0">
+              <a:rPr sz="650" b="0">
                 <a:solidFill>
                   <a:srgbClr val="12151C"/>
                 </a:solidFill>
@@ -3388,14 +3439,14 @@
       </p:sp>
       <p:sp>
         <p:nvSpPr>
-          <p:cNvPr id="10" name="텍스트"/>
+          <p:cNvPr id="12" name="텍스트"/>
           <p:cNvSpPr txBox="1"/>
           <p:nvPr/>
         </p:nvSpPr>
         <p:spPr>
           <a:xfrm>
-            <a:off x="1692000" y="1458000"/>
-            <a:ext cx="331200" cy="99061"/>
+            <a:off x="1260000" y="1184400"/>
+            <a:ext cx="331200" cy="91441"/>
           </a:xfrm>
           <a:prstGeom prst="rect">
             <a:avLst/>
@@ -3410,11 +3461,11 @@
           <a:p>
             <a:pPr algn="l">
               <a:lnSpc>
-                <a:spcPts val="754"/>
+                <a:spcPts val="696"/>
               </a:lnSpc>
             </a:pPr>
             <a:r>
-              <a:rPr sz="520" b="1" spc="120">
+              <a:rPr sz="480" b="1" spc="140">
                 <a:solidFill>
                   <a:srgbClr val="6B7280"/>
                 </a:solidFill>
@@ -3428,14 +3479,14 @@
       </p:sp>
       <p:sp>
         <p:nvSpPr>
-          <p:cNvPr id="11" name="텍스트"/>
+          <p:cNvPr id="13" name="텍스트"/>
           <p:cNvSpPr txBox="1"/>
           <p:nvPr/>
         </p:nvSpPr>
         <p:spPr>
           <a:xfrm>
-            <a:off x="2023200" y="1447200"/>
-            <a:ext cx="1188000" cy="125731"/>
+            <a:off x="1591200" y="1173600"/>
+            <a:ext cx="1188000" cy="123826"/>
           </a:xfrm>
           <a:prstGeom prst="rect">
             <a:avLst/>
@@ -3450,11 +3501,11 @@
           <a:p>
             <a:pPr algn="l">
               <a:lnSpc>
-                <a:spcPts val="956"/>
+                <a:spcPts val="942"/>
               </a:lnSpc>
             </a:pPr>
             <a:r>
-              <a:rPr sz="660" b="0">
+              <a:rPr sz="650" b="0">
                 <a:solidFill>
                   <a:srgbClr val="12151C"/>
                 </a:solidFill>
@@ -3468,14 +3519,14 @@
       </p:sp>
       <p:sp>
         <p:nvSpPr>
-          <p:cNvPr id="12" name="텍스트"/>
+          <p:cNvPr id="14" name="텍스트"/>
           <p:cNvSpPr txBox="1"/>
           <p:nvPr/>
         </p:nvSpPr>
         <p:spPr>
           <a:xfrm>
-            <a:off x="1692000" y="1587600"/>
-            <a:ext cx="331200" cy="99061"/>
+            <a:off x="1260000" y="1314000"/>
+            <a:ext cx="331200" cy="91441"/>
           </a:xfrm>
           <a:prstGeom prst="rect">
             <a:avLst/>
@@ -3490,11 +3541,11 @@
           <a:p>
             <a:pPr algn="l">
               <a:lnSpc>
-                <a:spcPts val="754"/>
+                <a:spcPts val="696"/>
               </a:lnSpc>
             </a:pPr>
             <a:r>
-              <a:rPr sz="520" b="1" spc="120">
+              <a:rPr sz="480" b="1" spc="140">
                 <a:solidFill>
                   <a:srgbClr val="6B7280"/>
                 </a:solidFill>
@@ -3508,14 +3559,14 @@
       </p:sp>
       <p:sp>
         <p:nvSpPr>
-          <p:cNvPr id="13" name="텍스트"/>
+          <p:cNvPr id="15" name="텍스트"/>
           <p:cNvSpPr txBox="1"/>
           <p:nvPr/>
         </p:nvSpPr>
         <p:spPr>
           <a:xfrm>
-            <a:off x="2023200" y="1576800"/>
-            <a:ext cx="1188000" cy="125731"/>
+            <a:off x="1591200" y="1303200"/>
+            <a:ext cx="1188000" cy="123826"/>
           </a:xfrm>
           <a:prstGeom prst="rect">
             <a:avLst/>
@@ -3530,11 +3581,11 @@
           <a:p>
             <a:pPr algn="l">
               <a:lnSpc>
-                <a:spcPts val="956"/>
+                <a:spcPts val="942"/>
               </a:lnSpc>
             </a:pPr>
             <a:r>
-              <a:rPr sz="660" b="0">
+              <a:rPr sz="650" b="0">
                 <a:solidFill>
                   <a:srgbClr val="12151C"/>
                 </a:solidFill>
@@ -3574,43 +3625,14 @@
       <p:grpSpPr/>
       <p:sp>
         <p:nvSpPr>
-          <p:cNvPr id="2" name="Oval 1"/>
-          <p:cNvSpPr/>
-          <p:nvPr/>
-        </p:nvSpPr>
-        <p:spPr>
-          <a:xfrm>
-            <a:off x="1411200" y="295200"/>
-            <a:ext cx="417600" cy="417600"/>
-          </a:xfrm>
-          <a:prstGeom prst="ellipse">
-            <a:avLst/>
-          </a:prstGeom>
-          <a:solidFill>
-            <a:srgbClr val="6F6FFF"/>
-          </a:solidFill>
-          <a:ln>
-            <a:noFill/>
-          </a:ln>
-        </p:spPr>
-        <p:txBody>
-          <a:bodyPr rtlCol="0" anchor="ctr"/>
-          <a:lstStyle/>
-          <a:p>
-            <a:pPr algn="ctr"/>
-          </a:p>
-        </p:txBody>
-      </p:sp>
-      <p:sp>
-        <p:nvSpPr>
-          <p:cNvPr id="3" name="텍스트"/>
+          <p:cNvPr id="2" name="텍스트"/>
           <p:cNvSpPr txBox="1"/>
           <p:nvPr/>
         </p:nvSpPr>
         <p:spPr>
           <a:xfrm>
-            <a:off x="1368000" y="324000"/>
-            <a:ext cx="504000" cy="360000"/>
+            <a:off x="252000" y="252000"/>
+            <a:ext cx="1080000" cy="99061"/>
           </a:xfrm>
           <a:prstGeom prst="rect">
             <a:avLst/>
@@ -3618,79 +3640,39 @@
           <a:noFill/>
         </p:spPr>
         <p:txBody>
-          <a:bodyPr wrap="square" lIns="0" rIns="0" tIns="0" bIns="0" anchor="ctr">
+          <a:bodyPr wrap="square" lIns="0" rIns="0" tIns="0" bIns="0" anchor="t">
             <a:spAutoFit/>
           </a:bodyPr>
           <a:lstStyle/>
           <a:p>
-            <a:pPr algn="ctr">
+            <a:pPr algn="l">
               <a:lnSpc>
-                <a:spcPts val="3769"/>
+                <a:spcPts val="754"/>
               </a:lnSpc>
             </a:pPr>
             <a:r>
-              <a:rPr sz="2600" b="1">
+              <a:rPr sz="520" b="1" spc="240">
                 <a:solidFill>
-                  <a:srgbClr val="FFFFFF"/>
+                  <a:srgbClr val="A3A9B5"/>
                 </a:solidFill>
                 <a:latin typeface="맑은 고딕"/>
                 <a:ea typeface="맑은 고딕"/>
               </a:rPr>
-              <a:t>샵</a:t>
-            </a:r>
-          </a:p>
-        </p:txBody>
-      </p:sp>
-      <p:sp>
-        <p:nvSpPr>
-          <p:cNvPr id="4" name="텍스트"/>
-          <p:cNvSpPr txBox="1"/>
-          <p:nvPr/>
-        </p:nvSpPr>
-        <p:spPr>
-          <a:xfrm>
-            <a:off x="360000" y="820800"/>
-            <a:ext cx="2520000" cy="161926"/>
-          </a:xfrm>
-          <a:prstGeom prst="rect">
-            <a:avLst/>
-          </a:prstGeom>
-          <a:noFill/>
-        </p:spPr>
-        <p:txBody>
-          <a:bodyPr wrap="square" lIns="0" rIns="0" tIns="0" bIns="0" anchor="t">
-            <a:spAutoFit/>
-          </a:bodyPr>
-          <a:lstStyle/>
-          <a:p>
-            <a:pPr algn="ctr">
-              <a:lnSpc>
-                <a:spcPts val="1232"/>
-              </a:lnSpc>
-            </a:pPr>
-            <a:r>
-              <a:rPr sz="850" b="1" spc="200">
-                <a:solidFill>
-                  <a:srgbClr val="FFFFFF"/>
-                </a:solidFill>
-                <a:latin typeface="맑은 고딕"/>
-                <a:ea typeface="맑은 고딕"/>
-              </a:rPr>
-              <a:t>샵 이름</a:t>
-            </a:r>
-          </a:p>
-        </p:txBody>
-      </p:sp>
-      <p:sp>
-        <p:nvSpPr>
-          <p:cNvPr id="5" name="Rectangle 4"/>
+              <a:t>시술 안내</a:t>
+            </a:r>
+          </a:p>
+        </p:txBody>
+      </p:sp>
+      <p:sp>
+        <p:nvSpPr>
+          <p:cNvPr id="3" name="Rectangle 2"/>
           <p:cNvSpPr/>
           <p:nvPr/>
         </p:nvSpPr>
         <p:spPr>
           <a:xfrm>
-            <a:off x="1530000" y="1051200"/>
-            <a:ext cx="180000" cy="14400"/>
+            <a:off x="252000" y="367200"/>
+            <a:ext cx="108000" cy="14400"/>
           </a:xfrm>
           <a:prstGeom prst="rect">
             <a:avLst/>
@@ -3712,14 +3694,45 @@
       </p:sp>
       <p:sp>
         <p:nvSpPr>
-          <p:cNvPr id="6" name="텍스트"/>
+          <p:cNvPr id="4" name="Rounded Rectangle 3"/>
+          <p:cNvSpPr/>
+          <p:nvPr/>
+        </p:nvSpPr>
+        <p:spPr>
+          <a:xfrm>
+            <a:off x="252000" y="540000"/>
+            <a:ext cx="327667" cy="194361"/>
+          </a:xfrm>
+          <a:prstGeom prst="roundRect">
+            <a:avLst>
+              <a:gd name="adj" fmla="val 50000"/>
+            </a:avLst>
+          </a:prstGeom>
+          <a:noFill/>
+          <a:ln w="3600">
+            <a:solidFill>
+              <a:srgbClr val="A3A9B5"/>
+            </a:solidFill>
+          </a:ln>
+        </p:spPr>
+        <p:txBody>
+          <a:bodyPr rtlCol="0" anchor="ctr"/>
+          <a:lstStyle/>
+          <a:p>
+            <a:pPr algn="ctr"/>
+          </a:p>
+        </p:txBody>
+      </p:sp>
+      <p:sp>
+        <p:nvSpPr>
+          <p:cNvPr id="5" name="텍스트"/>
           <p:cNvSpPr txBox="1"/>
           <p:nvPr/>
         </p:nvSpPr>
         <p:spPr>
           <a:xfrm>
-            <a:off x="540000" y="1188000"/>
-            <a:ext cx="2160000" cy="360000"/>
+            <a:off x="252000" y="540000"/>
+            <a:ext cx="327667" cy="194361"/>
           </a:xfrm>
           <a:prstGeom prst="rect">
             <a:avLst/>
@@ -3727,25 +3740,459 @@
           <a:noFill/>
         </p:spPr>
         <p:txBody>
+          <a:bodyPr wrap="square" lIns="0" rIns="0" tIns="0" bIns="0" anchor="ctr">
+            <a:spAutoFit/>
+          </a:bodyPr>
+          <a:lstStyle/>
+          <a:p>
+            <a:pPr algn="ctr">
+              <a:lnSpc>
+                <a:spcPts val="986"/>
+              </a:lnSpc>
+            </a:pPr>
+            <a:r>
+              <a:rPr sz="680" b="0">
+                <a:solidFill>
+                  <a:srgbClr val="FFFFFF"/>
+                </a:solidFill>
+                <a:latin typeface="맑은 고딕"/>
+                <a:ea typeface="맑은 고딕"/>
+              </a:rPr>
+              <a:t>염색</a:t>
+            </a:r>
+          </a:p>
+        </p:txBody>
+      </p:sp>
+      <p:sp>
+        <p:nvSpPr>
+          <p:cNvPr id="6" name="Rounded Rectangle 5"/>
+          <p:cNvSpPr/>
+          <p:nvPr/>
+        </p:nvSpPr>
+        <p:spPr>
+          <a:xfrm>
+            <a:off x="630067" y="540000"/>
+            <a:ext cx="412300" cy="194361"/>
+          </a:xfrm>
+          <a:prstGeom prst="roundRect">
+            <a:avLst>
+              <a:gd name="adj" fmla="val 50000"/>
+            </a:avLst>
+          </a:prstGeom>
+          <a:noFill/>
+          <a:ln w="3600">
+            <a:solidFill>
+              <a:srgbClr val="A3A9B5"/>
+            </a:solidFill>
+          </a:ln>
+        </p:spPr>
+        <p:txBody>
+          <a:bodyPr rtlCol="0" anchor="ctr"/>
+          <a:lstStyle/>
+          <a:p>
+            <a:pPr algn="ctr"/>
+          </a:p>
+        </p:txBody>
+      </p:sp>
+      <p:sp>
+        <p:nvSpPr>
+          <p:cNvPr id="7" name="텍스트"/>
+          <p:cNvSpPr txBox="1"/>
+          <p:nvPr/>
+        </p:nvSpPr>
+        <p:spPr>
+          <a:xfrm>
+            <a:off x="630067" y="540000"/>
+            <a:ext cx="412300" cy="194361"/>
+          </a:xfrm>
+          <a:prstGeom prst="rect">
+            <a:avLst/>
+          </a:prstGeom>
+          <a:noFill/>
+        </p:spPr>
+        <p:txBody>
+          <a:bodyPr wrap="square" lIns="0" rIns="0" tIns="0" bIns="0" anchor="ctr">
+            <a:spAutoFit/>
+          </a:bodyPr>
+          <a:lstStyle/>
+          <a:p>
+            <a:pPr algn="ctr">
+              <a:lnSpc>
+                <a:spcPts val="986"/>
+              </a:lnSpc>
+            </a:pPr>
+            <a:r>
+              <a:rPr sz="680" b="0">
+                <a:solidFill>
+                  <a:srgbClr val="FFFFFF"/>
+                </a:solidFill>
+                <a:latin typeface="맑은 고딕"/>
+                <a:ea typeface="맑은 고딕"/>
+              </a:rPr>
+              <a:t>클리닉</a:t>
+            </a:r>
+          </a:p>
+        </p:txBody>
+      </p:sp>
+      <p:sp>
+        <p:nvSpPr>
+          <p:cNvPr id="8" name="Rounded Rectangle 7"/>
+          <p:cNvSpPr/>
+          <p:nvPr/>
+        </p:nvSpPr>
+        <p:spPr>
+          <a:xfrm>
+            <a:off x="1092767" y="540000"/>
+            <a:ext cx="496933" cy="194361"/>
+          </a:xfrm>
+          <a:prstGeom prst="roundRect">
+            <a:avLst>
+              <a:gd name="adj" fmla="val 50000"/>
+            </a:avLst>
+          </a:prstGeom>
+          <a:noFill/>
+          <a:ln w="3600">
+            <a:solidFill>
+              <a:srgbClr val="A3A9B5"/>
+            </a:solidFill>
+          </a:ln>
+        </p:spPr>
+        <p:txBody>
+          <a:bodyPr rtlCol="0" anchor="ctr"/>
+          <a:lstStyle/>
+          <a:p>
+            <a:pPr algn="ctr"/>
+          </a:p>
+        </p:txBody>
+      </p:sp>
+      <p:sp>
+        <p:nvSpPr>
+          <p:cNvPr id="9" name="텍스트"/>
+          <p:cNvSpPr txBox="1"/>
+          <p:nvPr/>
+        </p:nvSpPr>
+        <p:spPr>
+          <a:xfrm>
+            <a:off x="1092767" y="540000"/>
+            <a:ext cx="496933" cy="194361"/>
+          </a:xfrm>
+          <a:prstGeom prst="rect">
+            <a:avLst/>
+          </a:prstGeom>
+          <a:noFill/>
+        </p:spPr>
+        <p:txBody>
+          <a:bodyPr wrap="square" lIns="0" rIns="0" tIns="0" bIns="0" anchor="ctr">
+            <a:spAutoFit/>
+          </a:bodyPr>
+          <a:lstStyle/>
+          <a:p>
+            <a:pPr algn="ctr">
+              <a:lnSpc>
+                <a:spcPts val="986"/>
+              </a:lnSpc>
+            </a:pPr>
+            <a:r>
+              <a:rPr sz="680" b="0">
+                <a:solidFill>
+                  <a:srgbClr val="FFFFFF"/>
+                </a:solidFill>
+                <a:latin typeface="맑은 고딕"/>
+                <a:ea typeface="맑은 고딕"/>
+              </a:rPr>
+              <a:t>젤 케어</a:t>
+            </a:r>
+          </a:p>
+        </p:txBody>
+      </p:sp>
+      <p:sp>
+        <p:nvSpPr>
+          <p:cNvPr id="10" name="Rounded Rectangle 9"/>
+          <p:cNvSpPr/>
+          <p:nvPr/>
+        </p:nvSpPr>
+        <p:spPr>
+          <a:xfrm>
+            <a:off x="1640100" y="540000"/>
+            <a:ext cx="581567" cy="194361"/>
+          </a:xfrm>
+          <a:prstGeom prst="roundRect">
+            <a:avLst>
+              <a:gd name="adj" fmla="val 50000"/>
+            </a:avLst>
+          </a:prstGeom>
+          <a:noFill/>
+          <a:ln w="3600">
+            <a:solidFill>
+              <a:srgbClr val="A3A9B5"/>
+            </a:solidFill>
+          </a:ln>
+        </p:spPr>
+        <p:txBody>
+          <a:bodyPr rtlCol="0" anchor="ctr"/>
+          <a:lstStyle/>
+          <a:p>
+            <a:pPr algn="ctr"/>
+          </a:p>
+        </p:txBody>
+      </p:sp>
+      <p:sp>
+        <p:nvSpPr>
+          <p:cNvPr id="11" name="텍스트"/>
+          <p:cNvSpPr txBox="1"/>
+          <p:nvPr/>
+        </p:nvSpPr>
+        <p:spPr>
+          <a:xfrm>
+            <a:off x="1640100" y="540000"/>
+            <a:ext cx="581567" cy="194361"/>
+          </a:xfrm>
+          <a:prstGeom prst="rect">
+            <a:avLst/>
+          </a:prstGeom>
+          <a:noFill/>
+        </p:spPr>
+        <p:txBody>
+          <a:bodyPr wrap="square" lIns="0" rIns="0" tIns="0" bIns="0" anchor="ctr">
+            <a:spAutoFit/>
+          </a:bodyPr>
+          <a:lstStyle/>
+          <a:p>
+            <a:pPr algn="ctr">
+              <a:lnSpc>
+                <a:spcPts val="986"/>
+              </a:lnSpc>
+            </a:pPr>
+            <a:r>
+              <a:rPr sz="680" b="0">
+                <a:solidFill>
+                  <a:srgbClr val="FFFFFF"/>
+                </a:solidFill>
+                <a:latin typeface="맑은 고딕"/>
+                <a:ea typeface="맑은 고딕"/>
+              </a:rPr>
+              <a:t>두피 케어</a:t>
+            </a:r>
+          </a:p>
+        </p:txBody>
+      </p:sp>
+      <p:cxnSp>
+        <p:nvCxnSpPr>
+          <p:cNvPr id="12" name="Connector 11"/>
+          <p:cNvCxnSpPr/>
+          <p:nvPr/>
+        </p:nvCxnSpPr>
+        <p:spPr>
+          <a:xfrm>
+            <a:off x="252000" y="1339200"/>
+            <a:ext cx="2736000" cy="0"/>
+          </a:xfrm>
+          <a:prstGeom prst="line">
+            <a:avLst/>
+          </a:prstGeom>
+          <a:ln w="3600">
+            <a:solidFill>
+              <a:srgbClr val="2A2F38"/>
+            </a:solidFill>
+          </a:ln>
+        </p:spPr>
+      </p:cxnSp>
+      <p:sp>
+        <p:nvSpPr>
+          <p:cNvPr id="13" name="텍스트"/>
+          <p:cNvSpPr txBox="1"/>
+          <p:nvPr/>
+        </p:nvSpPr>
+        <p:spPr>
+          <a:xfrm>
+            <a:off x="252000" y="1422000"/>
+            <a:ext cx="396000" cy="91441"/>
+          </a:xfrm>
+          <a:prstGeom prst="rect">
+            <a:avLst/>
+          </a:prstGeom>
+          <a:noFill/>
+        </p:spPr>
+        <p:txBody>
           <a:bodyPr wrap="square" lIns="0" rIns="0" tIns="0" bIns="0" anchor="t">
             <a:spAutoFit/>
           </a:bodyPr>
           <a:lstStyle/>
           <a:p>
-            <a:pPr algn="ctr">
+            <a:pPr algn="l">
               <a:lnSpc>
-                <a:spcPts val="1305"/>
+                <a:spcPts val="696"/>
               </a:lnSpc>
             </a:pPr>
             <a:r>
-              <a:rPr sz="900" b="1">
+              <a:rPr sz="480" b="1" spc="140">
                 <a:solidFill>
                   <a:srgbClr val="A3A9B5"/>
                 </a:solidFill>
                 <a:latin typeface="맑은 고딕"/>
                 <a:ea typeface="맑은 고딕"/>
               </a:rPr>
-              <a:t>자신을 아끼는 첫걸음</a:t>
+              <a:t>HOURS</a:t>
+            </a:r>
+          </a:p>
+        </p:txBody>
+      </p:sp>
+      <p:sp>
+        <p:nvSpPr>
+          <p:cNvPr id="14" name="텍스트"/>
+          <p:cNvSpPr txBox="1"/>
+          <p:nvPr/>
+        </p:nvSpPr>
+        <p:spPr>
+          <a:xfrm>
+            <a:off x="648000" y="1411200"/>
+            <a:ext cx="2340000" cy="121921"/>
+          </a:xfrm>
+          <a:prstGeom prst="rect">
+            <a:avLst/>
+          </a:prstGeom>
+          <a:noFill/>
+        </p:spPr>
+        <p:txBody>
+          <a:bodyPr wrap="square" lIns="0" rIns="0" tIns="0" bIns="0" anchor="t">
+            <a:spAutoFit/>
+          </a:bodyPr>
+          <a:lstStyle/>
+          <a:p>
+            <a:pPr algn="l">
+              <a:lnSpc>
+                <a:spcPts val="927"/>
+              </a:lnSpc>
+            </a:pPr>
+            <a:r>
+              <a:rPr sz="640" b="0">
+                <a:solidFill>
+                  <a:srgbClr val="FFFFFF"/>
+                </a:solidFill>
+                <a:latin typeface="맑은 고딕"/>
+                <a:ea typeface="맑은 고딕"/>
+              </a:rPr>
+              <a:t>화–일 10:00 – 20:00</a:t>
+            </a:r>
+          </a:p>
+        </p:txBody>
+      </p:sp>
+      <p:sp>
+        <p:nvSpPr>
+          <p:cNvPr id="15" name="텍스트"/>
+          <p:cNvSpPr txBox="1"/>
+          <p:nvPr/>
+        </p:nvSpPr>
+        <p:spPr>
+          <a:xfrm>
+            <a:off x="252000" y="1580400"/>
+            <a:ext cx="396000" cy="91441"/>
+          </a:xfrm>
+          <a:prstGeom prst="rect">
+            <a:avLst/>
+          </a:prstGeom>
+          <a:noFill/>
+        </p:spPr>
+        <p:txBody>
+          <a:bodyPr wrap="square" lIns="0" rIns="0" tIns="0" bIns="0" anchor="t">
+            <a:spAutoFit/>
+          </a:bodyPr>
+          <a:lstStyle/>
+          <a:p>
+            <a:pPr algn="l">
+              <a:lnSpc>
+                <a:spcPts val="696"/>
+              </a:lnSpc>
+            </a:pPr>
+            <a:r>
+              <a:rPr sz="480" b="1" spc="140">
+                <a:solidFill>
+                  <a:srgbClr val="A3A9B5"/>
+                </a:solidFill>
+                <a:latin typeface="맑은 고딕"/>
+                <a:ea typeface="맑은 고딕"/>
+              </a:rPr>
+              <a:t>WEB</a:t>
+            </a:r>
+          </a:p>
+        </p:txBody>
+      </p:sp>
+      <p:sp>
+        <p:nvSpPr>
+          <p:cNvPr id="16" name="텍스트"/>
+          <p:cNvSpPr txBox="1"/>
+          <p:nvPr/>
+        </p:nvSpPr>
+        <p:spPr>
+          <a:xfrm>
+            <a:off x="648000" y="1569600"/>
+            <a:ext cx="2340000" cy="121921"/>
+          </a:xfrm>
+          <a:prstGeom prst="rect">
+            <a:avLst/>
+          </a:prstGeom>
+          <a:noFill/>
+        </p:spPr>
+        <p:txBody>
+          <a:bodyPr wrap="square" lIns="0" rIns="0" tIns="0" bIns="0" anchor="t">
+            <a:spAutoFit/>
+          </a:bodyPr>
+          <a:lstStyle/>
+          <a:p>
+            <a:pPr algn="l">
+              <a:lnSpc>
+                <a:spcPts val="927"/>
+              </a:lnSpc>
+            </a:pPr>
+            <a:r>
+              <a:rPr sz="640" b="0">
+                <a:solidFill>
+                  <a:srgbClr val="FFFFFF"/>
+                </a:solidFill>
+                <a:latin typeface="맑은 고딕"/>
+                <a:ea typeface="맑은 고딕"/>
+              </a:rPr>
+              <a:t>www.example.com</a:t>
+            </a:r>
+          </a:p>
+        </p:txBody>
+      </p:sp>
+      <p:sp>
+        <p:nvSpPr>
+          <p:cNvPr id="17" name="텍스트"/>
+          <p:cNvSpPr txBox="1"/>
+          <p:nvPr/>
+        </p:nvSpPr>
+        <p:spPr>
+          <a:xfrm>
+            <a:off x="1548000" y="1411200"/>
+            <a:ext cx="1440000" cy="123826"/>
+          </a:xfrm>
+          <a:prstGeom prst="rect">
+            <a:avLst/>
+          </a:prstGeom>
+          <a:noFill/>
+        </p:spPr>
+        <p:txBody>
+          <a:bodyPr wrap="square" lIns="0" rIns="0" tIns="0" bIns="0" anchor="t">
+            <a:spAutoFit/>
+          </a:bodyPr>
+          <a:lstStyle/>
+          <a:p>
+            <a:pPr algn="r">
+              <a:lnSpc>
+                <a:spcPts val="942"/>
+              </a:lnSpc>
+            </a:pPr>
+            <a:r>
+              <a:rPr sz="650" b="1" spc="220">
+                <a:solidFill>
+                  <a:srgbClr val="A3A9B5"/>
+                </a:solidFill>
+                <a:latin typeface="맑은 고딕"/>
+                <a:ea typeface="맑은 고딕"/>
+              </a:rPr>
+              <a:t>샵 이름</a:t>
             </a:r>
           </a:p>
         </p:txBody>
